--- a/FPGA Implementation/Handshake/V0.4.4/Images of code1.pptx
+++ b/FPGA Implementation/Handshake/V0.4.4/Images of code1.pptx
@@ -3556,31 +3556,6 @@
           </a:p>
         </p:txBody>
       </p:sp>
-      <p:sp>
-        <p:nvSpPr>
-          <p:cNvPr id="7" name="Content Placeholder 6">
-            <a:extLst>
-              <a:ext uri="{FF2B5EF4-FFF2-40B4-BE49-F238E27FC236}">
-                <a16:creationId xmlns:a16="http://schemas.microsoft.com/office/drawing/2014/main" id="{55C9C18F-9253-2AEA-42F8-5EA01E489D28}"/>
-              </a:ext>
-            </a:extLst>
-          </p:cNvPr>
-          <p:cNvSpPr>
-            <a:spLocks noGrp="1"/>
-          </p:cNvSpPr>
-          <p:nvPr>
-            <p:ph idx="1"/>
-          </p:nvPr>
-        </p:nvSpPr>
-        <p:spPr/>
-        <p:txBody>
-          <a:bodyPr/>
-          <a:lstStyle/>
-          <a:p>
-            <a:endParaRPr lang="en-US"/>
-          </a:p>
-        </p:txBody>
-      </p:sp>
       <p:pic>
         <p:nvPicPr>
           <p:cNvPr id="9" name="Picture 8">
@@ -3603,8 +3578,8 @@
         </p:blipFill>
         <p:spPr>
           <a:xfrm>
-            <a:off x="2306320" y="1188386"/>
-            <a:ext cx="9589346" cy="5669613"/>
+            <a:off x="1746504" y="1389355"/>
+            <a:ext cx="9079314" cy="5368061"/>
           </a:xfrm>
           <a:prstGeom prst="rect">
             <a:avLst/>
@@ -3802,8 +3777,8 @@
         </p:blipFill>
         <p:spPr>
           <a:xfrm>
-            <a:off x="2392262" y="1026161"/>
-            <a:ext cx="9799738" cy="5831840"/>
+            <a:off x="1843210" y="1462087"/>
+            <a:ext cx="8867462" cy="5277041"/>
           </a:xfrm>
           <a:prstGeom prst="rect">
             <a:avLst/>
@@ -3874,31 +3849,6 @@
           </a:p>
         </p:txBody>
       </p:sp>
-      <p:sp>
-        <p:nvSpPr>
-          <p:cNvPr id="3" name="Content Placeholder 4">
-            <a:extLst>
-              <a:ext uri="{FF2B5EF4-FFF2-40B4-BE49-F238E27FC236}">
-                <a16:creationId xmlns:a16="http://schemas.microsoft.com/office/drawing/2014/main" id="{4767A11F-3C66-569E-7256-E154E0EEE614}"/>
-              </a:ext>
-            </a:extLst>
-          </p:cNvPr>
-          <p:cNvSpPr txBox="1">
-            <a:spLocks noGrp="1"/>
-          </p:cNvSpPr>
-          <p:nvPr>
-            <p:ph idx="1"/>
-          </p:nvPr>
-        </p:nvSpPr>
-        <p:spPr/>
-        <p:txBody>
-          <a:bodyPr/>
-          <a:lstStyle/>
-          <a:p>
-            <a:endParaRPr lang="en-US"/>
-          </a:p>
-        </p:txBody>
-      </p:sp>
       <p:pic>
         <p:nvPicPr>
           <p:cNvPr id="5" name="Picture 4">
@@ -3921,7 +3871,7 @@
         </p:blipFill>
         <p:spPr>
           <a:xfrm>
-            <a:off x="2672080" y="1398556"/>
+            <a:off x="1492893" y="1398557"/>
             <a:ext cx="9206214" cy="5459443"/>
           </a:xfrm>
           <a:prstGeom prst="rect">
@@ -3994,31 +3944,6 @@
           </a:p>
         </p:txBody>
       </p:sp>
-      <p:sp>
-        <p:nvSpPr>
-          <p:cNvPr id="3" name="Content Placeholder 4">
-            <a:extLst>
-              <a:ext uri="{FF2B5EF4-FFF2-40B4-BE49-F238E27FC236}">
-                <a16:creationId xmlns:a16="http://schemas.microsoft.com/office/drawing/2014/main" id="{11E0CA81-39BD-C515-1A1C-E64CCEE1B163}"/>
-              </a:ext>
-            </a:extLst>
-          </p:cNvPr>
-          <p:cNvSpPr txBox="1">
-            <a:spLocks noGrp="1"/>
-          </p:cNvSpPr>
-          <p:nvPr>
-            <p:ph idx="1"/>
-          </p:nvPr>
-        </p:nvSpPr>
-        <p:spPr/>
-        <p:txBody>
-          <a:bodyPr/>
-          <a:lstStyle/>
-          <a:p>
-            <a:endParaRPr lang="en-US"/>
-          </a:p>
-        </p:txBody>
-      </p:sp>
       <p:pic>
         <p:nvPicPr>
           <p:cNvPr id="5" name="Picture 4">
@@ -4041,8 +3966,8 @@
         </p:blipFill>
         <p:spPr>
           <a:xfrm>
-            <a:off x="2489200" y="1290106"/>
-            <a:ext cx="9389094" cy="5567894"/>
+            <a:off x="1874520" y="1425312"/>
+            <a:ext cx="8760190" cy="5194943"/>
           </a:xfrm>
           <a:prstGeom prst="rect">
             <a:avLst/>
@@ -4605,20 +4530,20 @@
 </file>
 
 <file path=customXml/item2.xml><?xml version="1.0" encoding="utf-8"?>
+<p:properties xmlns:p="http://schemas.microsoft.com/office/2006/metadata/properties" xmlns:xsi="http://www.w3.org/2001/XMLSchema-instance" xmlns:pc="http://schemas.microsoft.com/office/infopath/2007/PartnerControls">
+  <documentManagement>
+    <_activity xmlns="d3afe3c7-f7c7-4289-8ec7-fcbbb8b750c6" xsi:nil="true"/>
+  </documentManagement>
+</p:properties>
+</file>
+
+<file path=customXml/item3.xml><?xml version="1.0" encoding="utf-8"?>
 <?mso-contentType ?>
 <FormTemplates xmlns="http://schemas.microsoft.com/sharepoint/v3/contenttype/forms">
   <Display>DocumentLibraryForm</Display>
   <Edit>DocumentLibraryForm</Edit>
   <New>DocumentLibraryForm</New>
 </FormTemplates>
-</file>
-
-<file path=customXml/item3.xml><?xml version="1.0" encoding="utf-8"?>
-<p:properties xmlns:p="http://schemas.microsoft.com/office/2006/metadata/properties" xmlns:xsi="http://www.w3.org/2001/XMLSchema-instance" xmlns:pc="http://schemas.microsoft.com/office/infopath/2007/PartnerControls">
-  <documentManagement>
-    <_activity xmlns="d3afe3c7-f7c7-4289-8ec7-fcbbb8b750c6" xsi:nil="true"/>
-  </documentManagement>
-</p:properties>
 </file>
 
 <file path=customXml/itemProps1.xml><?xml version="1.0" encoding="utf-8"?>
@@ -4641,14 +4566,6 @@
 </file>
 
 <file path=customXml/itemProps2.xml><?xml version="1.0" encoding="utf-8"?>
-<ds:datastoreItem xmlns:ds="http://schemas.openxmlformats.org/officeDocument/2006/customXml" ds:itemID="{D9C45F11-969A-418C-A26A-264100A49ADB}">
-  <ds:schemaRefs>
-    <ds:schemaRef ds:uri="http://schemas.microsoft.com/sharepoint/v3/contenttype/forms"/>
-  </ds:schemaRefs>
-</ds:datastoreItem>
-</file>
-
-<file path=customXml/itemProps3.xml><?xml version="1.0" encoding="utf-8"?>
 <ds:datastoreItem xmlns:ds="http://schemas.openxmlformats.org/officeDocument/2006/customXml" ds:itemID="{FEFA0585-9349-44C3-81BF-B9D8E8CD4A3A}">
   <ds:schemaRefs>
     <ds:schemaRef ds:uri="http://schemas.openxmlformats.org/package/2006/metadata/core-properties"/>
@@ -4663,4 +4580,12 @@
     <ds:schemaRef ds:uri="http://schemas.microsoft.com/office/2006/metadata/properties"/>
   </ds:schemaRefs>
 </ds:datastoreItem>
+</file>
+
+<file path=customXml/itemProps3.xml><?xml version="1.0" encoding="utf-8"?>
+<ds:datastoreItem xmlns:ds="http://schemas.openxmlformats.org/officeDocument/2006/customXml" ds:itemID="{D9C45F11-969A-418C-A26A-264100A49ADB}">
+  <ds:schemaRefs>
+    <ds:schemaRef ds:uri="http://schemas.microsoft.com/sharepoint/v3/contenttype/forms"/>
+  </ds:schemaRefs>
+</ds:datastoreItem>
 </file>
--- a/FPGA Implementation/Handshake/V0.4.4/Images of code1.pptx
+++ b/FPGA Implementation/Handshake/V0.4.4/Images of code1.pptx
@@ -4530,20 +4530,20 @@
 </file>
 
 <file path=customXml/item2.xml><?xml version="1.0" encoding="utf-8"?>
-<p:properties xmlns:p="http://schemas.microsoft.com/office/2006/metadata/properties" xmlns:xsi="http://www.w3.org/2001/XMLSchema-instance" xmlns:pc="http://schemas.microsoft.com/office/infopath/2007/PartnerControls">
-  <documentManagement>
-    <_activity xmlns="d3afe3c7-f7c7-4289-8ec7-fcbbb8b750c6" xsi:nil="true"/>
-  </documentManagement>
-</p:properties>
-</file>
-
-<file path=customXml/item3.xml><?xml version="1.0" encoding="utf-8"?>
 <?mso-contentType ?>
 <FormTemplates xmlns="http://schemas.microsoft.com/sharepoint/v3/contenttype/forms">
   <Display>DocumentLibraryForm</Display>
   <Edit>DocumentLibraryForm</Edit>
   <New>DocumentLibraryForm</New>
 </FormTemplates>
+</file>
+
+<file path=customXml/item3.xml><?xml version="1.0" encoding="utf-8"?>
+<p:properties xmlns:p="http://schemas.microsoft.com/office/2006/metadata/properties" xmlns:xsi="http://www.w3.org/2001/XMLSchema-instance" xmlns:pc="http://schemas.microsoft.com/office/infopath/2007/PartnerControls">
+  <documentManagement>
+    <_activity xmlns="d3afe3c7-f7c7-4289-8ec7-fcbbb8b750c6" xsi:nil="true"/>
+  </documentManagement>
+</p:properties>
 </file>
 
 <file path=customXml/itemProps1.xml><?xml version="1.0" encoding="utf-8"?>
@@ -4566,6 +4566,14 @@
 </file>
 
 <file path=customXml/itemProps2.xml><?xml version="1.0" encoding="utf-8"?>
+<ds:datastoreItem xmlns:ds="http://schemas.openxmlformats.org/officeDocument/2006/customXml" ds:itemID="{D9C45F11-969A-418C-A26A-264100A49ADB}">
+  <ds:schemaRefs>
+    <ds:schemaRef ds:uri="http://schemas.microsoft.com/sharepoint/v3/contenttype/forms"/>
+  </ds:schemaRefs>
+</ds:datastoreItem>
+</file>
+
+<file path=customXml/itemProps3.xml><?xml version="1.0" encoding="utf-8"?>
 <ds:datastoreItem xmlns:ds="http://schemas.openxmlformats.org/officeDocument/2006/customXml" ds:itemID="{FEFA0585-9349-44C3-81BF-B9D8E8CD4A3A}">
   <ds:schemaRefs>
     <ds:schemaRef ds:uri="http://schemas.openxmlformats.org/package/2006/metadata/core-properties"/>
@@ -4580,12 +4588,4 @@
     <ds:schemaRef ds:uri="http://schemas.microsoft.com/office/2006/metadata/properties"/>
   </ds:schemaRefs>
 </ds:datastoreItem>
-</file>
-
-<file path=customXml/itemProps3.xml><?xml version="1.0" encoding="utf-8"?>
-<ds:datastoreItem xmlns:ds="http://schemas.openxmlformats.org/officeDocument/2006/customXml" ds:itemID="{D9C45F11-969A-418C-A26A-264100A49ADB}">
-  <ds:schemaRefs>
-    <ds:schemaRef ds:uri="http://schemas.microsoft.com/sharepoint/v3/contenttype/forms"/>
-  </ds:schemaRefs>
-</ds:datastoreItem>
 </file>